--- a/dist/초5/수학/자연수의계산/초5_수학_자연수의계산_01_자연수의혼합계산.pptx
+++ b/dist/초5/수학/자연수의계산/초5_수학_자연수의계산_01_자연수의혼합계산.pptx
@@ -120,13 +120,13 @@
   <p:extLst>
     <p:ext uri="{521415D9-36F7-43E2-AB2F-B90AF26B5E84}">
       <p14:sectionLst xmlns:p14="http://schemas.microsoft.com/office/powerpoint/2010/main">
-        <p14:section name="도입" id="{b8955b5d-ae23-194d-5450-cca10a741c87}">
+        <p14:section name="도입" id="{ff3ba6b1-fe6b-bd81-7696-f0d7ac8c5105}">
           <p14:sldIdLst>
             <p14:sldId id="256"/>
             <p14:sldId id="257"/>
           </p14:sldIdLst>
         </p14:section>
-        <p14:section name="개념" id="{5c2ae9c9-b58c-c925-fb3c-358c43e6e0af}">
+        <p14:section name="개념" id="{817e1fe1-1472-dda3-b734-0503d47f26e9}">
           <p14:sldIdLst>
             <p14:sldId id="258"/>
             <p14:sldId id="259"/>
@@ -134,38 +134,38 @@
             <p14:sldId id="263"/>
           </p14:sldIdLst>
         </p14:section>
-        <p14:section name="연습" id="{0937bc83-fb07-1c14-83f4-ea56b36a7ef4}">
+        <p14:section name="연습" id="{845bf40b-224c-ca51-aa5d-7580a62de36d}">
           <p14:sldIdLst>
             <p14:sldId id="260"/>
             <p14:sldId id="262"/>
             <p14:sldId id="264"/>
           </p14:sldIdLst>
         </p14:section>
-        <p14:section name="개념" id="{d1880003-1cdc-2165-2168-58ad1f5050b2}">
+        <p14:section name="개념" id="{961e4dc4-e5cd-697e-9f5c-fda646dc75aa}">
           <p14:sldIdLst/>
         </p14:section>
-        <p14:section name="연습" id="{9dd05b82-f18e-a383-e0ea-6e13c2b7e404}">
+        <p14:section name="연습" id="{1f684a54-6d79-ce8d-44fb-3e05dfee97ea}">
           <p14:sldIdLst/>
         </p14:section>
-        <p14:section name="개념" id="{d1c1b9ed-968e-10e2-a109-cdf63bf265c0}">
+        <p14:section name="개념" id="{e54cf764-f862-c171-cff5-cb21e31a4f5b}">
           <p14:sldIdLst/>
         </p14:section>
-        <p14:section name="연습" id="{24b76822-1257-edf0-73fa-a06520ef9e3e}">
+        <p14:section name="연습" id="{3dfbe277-13f2-b432-02a1-4ba997ba1231}">
           <p14:sldIdLst/>
         </p14:section>
-        <p14:section name="확인" id="{310a9bdb-ac2b-54b5-fe1d-3eb2c876cfa7}">
+        <p14:section name="확인" id="{a3c07c18-7c09-1664-ae91-92ce4b9adb09}">
           <p14:sldIdLst>
             <p14:sldId id="265"/>
             <p14:sldId id="266"/>
             <p14:sldId id="267"/>
           </p14:sldIdLst>
         </p14:section>
-        <p14:section name="정리" id="{28c90555-b8ae-c9c2-20b4-7c504ac457d0}">
+        <p14:section name="정리" id="{f60d0926-408a-0545-a9d4-fd79d0cb7346}">
           <p14:sldIdLst>
             <p14:sldId id="268"/>
           </p14:sldIdLst>
         </p14:section>
-        <p14:section name="보충" id="{2b66d8ce-c348-c3b1-2bba-9dff19662a3f}">
+        <p14:section name="보충" id="{1772e744-a647-a717-74e4-9085d8805806}">
           <p14:sldIdLst>
             <p14:sldId id="269"/>
           </p14:sldIdLst>
